--- a/docs/samples/team-brief-ic-sample.pptx
+++ b/docs/samples/team-brief-ic-sample.pptx
@@ -1505,6 +1505,11 @@
           </a:p>
           <a:p>
             <a:r>
+              <a:t>- White City: Grade A vacancy 11.5% against 17.9% overall, gap widening: New and refurbished space in White City is 11.5% vacant against 17.9% for all space in Q2 2026, a gap of 6.4pp (from 5.0pp the quarter before). [1]</a:t>
+            </a:r>
+          </a:p>
+          <a:p>
+            <a:r>
               <a:t>- Barclays buys 1 Churchill Place, Canary Wharf, for £750m: Barclays has acquired its Canary Wharf headquarters at 1 Churchill Place for £750m, reflecting a 5.62% yield. The deal lifted Docklands &amp; Stratford investment turnover to £0.75bn in Q2 2026. [10]</a:t>
             </a:r>
           </a:p>
@@ -1526,11 +1531,6 @@
           <a:p>
             <a:r>
               <a:t>- 540,000 sq ft speculative scheme due Q4 2027 in Rest of Docklands: One North Quay, E14 (540,000 sq ft) is under construction without a pre-let and is expected to complete in Q4 2027. [6]</a:t>
-            </a:r>
-          </a:p>
-          <a:p>
-            <a:r>
-              <a:t>- Q4 2025 London office investment hits £3.3bn, best quarter since Q1 2022: London office investment reached £3.3bn in Q4 2025 with a further £3.1bn under offer, the strongest quarter since Q1 2022. [11]</a:t>
             </a:r>
           </a:p>
         </p:txBody>
@@ -8821,7 +8821,7 @@
           <a:p>
             <a:r>
               <a:rPr/>
-              <a:t>Top team signals (none added yet)</a:t>
+              <a:t>Investment committee paper  ·  figures to Q2 2026  ·  10 Oct 2026</a:t>
             </a:r>
           </a:p>
         </p:txBody>
@@ -8900,6 +8900,14 @@
                   <a:srgbClr val="C7CBD3"/>
                 </a:solidFill>
               </a:rPr>
+              <a:t/>
+            </a:r>
+            <a:r>
+              <a:rPr sz="1000">
+                <a:solidFill>
+                  <a:srgbClr val="C7CBD3"/>
+                </a:solidFill>
+              </a:rPr>
               <a:t> [1]</a:t>
             </a:r>
           </a:p>
@@ -8955,6 +8963,14 @@
                   <a:srgbClr val="C7CBD3"/>
                 </a:solidFill>
               </a:rPr>
+              <a:t/>
+            </a:r>
+            <a:r>
+              <a:rPr sz="1000">
+                <a:solidFill>
+                  <a:srgbClr val="C7CBD3"/>
+                </a:solidFill>
+              </a:rPr>
               <a:t> [1]</a:t>
             </a:r>
           </a:p>
@@ -9010,6 +9026,14 @@
                   <a:srgbClr val="C7CBD3"/>
                 </a:solidFill>
               </a:rPr>
+              <a:t/>
+            </a:r>
+            <a:r>
+              <a:rPr sz="1000">
+                <a:solidFill>
+                  <a:srgbClr val="C7CBD3"/>
+                </a:solidFill>
+              </a:rPr>
               <a:t> [1]</a:t>
             </a:r>
           </a:p>
@@ -9058,6 +9082,14 @@
                 <a:latin typeface="Calibri"/>
               </a:rPr>
               <a:t>3.75%</a:t>
+            </a:r>
+            <a:r>
+              <a:rPr sz="1000">
+                <a:solidFill>
+                  <a:srgbClr val="C7CBD3"/>
+                </a:solidFill>
+              </a:rPr>
+              <a:t/>
             </a:r>
             <a:r>
               <a:rPr sz="1000">
@@ -9183,12 +9215,14 @@
                 <a:tableStyleId>{5C22544A-7EE6-4342-B048-85BDC9FD1C3A}</a:tableStyleId>
               </a:tblPr>
               <a:tblGrid>
-                <a:gridCol w="1844040"/>
-                <a:gridCol w="1844040"/>
-                <a:gridCol w="1844040"/>
-                <a:gridCol w="1844040"/>
-                <a:gridCol w="1844040"/>
-                <a:gridCol w="1844040"/>
+                <a:gridCol w="1383030"/>
+                <a:gridCol w="1383030"/>
+                <a:gridCol w="1383030"/>
+                <a:gridCol w="1383030"/>
+                <a:gridCol w="1383030"/>
+                <a:gridCol w="1383030"/>
+                <a:gridCol w="1383030"/>
+                <a:gridCol w="1383030"/>
               </a:tblGrid>
               <a:tr h="384048">
                 <a:tc>
@@ -9244,6 +9278,27 @@
                             <a:srgbClr val="FFFFFF"/>
                           </a:solidFill>
                         </a:rPr>
+                        <a:t>GRADE A RENT</a:t>
+                      </a:r>
+                    </a:p>
+                  </a:txBody>
+                  <a:tcPr>
+                    <a:solidFill>
+                      <a:srgbClr val="111827"/>
+                    </a:solidFill>
+                  </a:tcPr>
+                </a:tc>
+                <a:tc>
+                  <a:txBody>
+                    <a:bodyPr/>
+                    <a:lstStyle/>
+                    <a:p>
+                      <a:r>
+                        <a:rPr sz="900" b="1">
+                          <a:solidFill>
+                            <a:srgbClr val="FFFFFF"/>
+                          </a:solidFill>
+                        </a:rPr>
                         <a:t>RENT-FREE (10-YR LEASE)</a:t>
                       </a:r>
                     </a:p>
@@ -9266,6 +9321,27 @@
                           </a:solidFill>
                         </a:rPr>
                         <a:t>VACANCY RATE</a:t>
+                      </a:r>
+                    </a:p>
+                  </a:txBody>
+                  <a:tcPr>
+                    <a:solidFill>
+                      <a:srgbClr val="111827"/>
+                    </a:solidFill>
+                  </a:tcPr>
+                </a:tc>
+                <a:tc>
+                  <a:txBody>
+                    <a:bodyPr/>
+                    <a:lstStyle/>
+                    <a:p>
+                      <a:r>
+                        <a:rPr sz="900" b="1">
+                          <a:solidFill>
+                            <a:srgbClr val="FFFFFF"/>
+                          </a:solidFill>
+                        </a:rPr>
+                        <a:t>NEW/REFURB (GRADE A) VACANCY</a:t>
                       </a:r>
                     </a:p>
                   </a:txBody>
@@ -9372,6 +9448,27 @@
                             <a:srgbClr val="111827"/>
                           </a:solidFill>
                         </a:rPr>
+                        <a:t>n/a</a:t>
+                      </a:r>
+                    </a:p>
+                  </a:txBody>
+                  <a:tcPr>
+                    <a:solidFill>
+                      <a:srgbClr val="FFFFFF"/>
+                    </a:solidFill>
+                  </a:tcPr>
+                </a:tc>
+                <a:tc>
+                  <a:txBody>
+                    <a:bodyPr/>
+                    <a:lstStyle/>
+                    <a:p>
+                      <a:r>
+                        <a:rPr sz="1000" b="0">
+                          <a:solidFill>
+                            <a:srgbClr val="111827"/>
+                          </a:solidFill>
+                        </a:rPr>
                         <a:t>21 months [1]</a:t>
                       </a:r>
                     </a:p>
@@ -9394,6 +9491,27 @@
                           </a:solidFill>
                         </a:rPr>
                         <a:t>7.0% [1]</a:t>
+                      </a:r>
+                    </a:p>
+                  </a:txBody>
+                  <a:tcPr>
+                    <a:solidFill>
+                      <a:srgbClr val="FFFFFF"/>
+                    </a:solidFill>
+                  </a:tcPr>
+                </a:tc>
+                <a:tc>
+                  <a:txBody>
+                    <a:bodyPr/>
+                    <a:lstStyle/>
+                    <a:p>
+                      <a:r>
+                        <a:rPr sz="1000" b="0">
+                          <a:solidFill>
+                            <a:srgbClr val="111827"/>
+                          </a:solidFill>
+                        </a:rPr>
+                        <a:t>5.3% [1]</a:t>
                       </a:r>
                     </a:p>
                   </a:txBody>
@@ -9500,6 +9618,27 @@
                             <a:srgbClr val="111827"/>
                           </a:solidFill>
                         </a:rPr>
+                        <a:t>n/a</a:t>
+                      </a:r>
+                    </a:p>
+                  </a:txBody>
+                  <a:tcPr>
+                    <a:solidFill>
+                      <a:srgbClr val="F3F4F6"/>
+                    </a:solidFill>
+                  </a:tcPr>
+                </a:tc>
+                <a:tc>
+                  <a:txBody>
+                    <a:bodyPr/>
+                    <a:lstStyle/>
+                    <a:p>
+                      <a:r>
+                        <a:rPr sz="1000" b="0">
+                          <a:solidFill>
+                            <a:srgbClr val="111827"/>
+                          </a:solidFill>
+                        </a:rPr>
                         <a:t>24 months [1]</a:t>
                       </a:r>
                     </a:p>
@@ -9522,6 +9661,27 @@
                           </a:solidFill>
                         </a:rPr>
                         <a:t>8.1% [1]</a:t>
+                      </a:r>
+                    </a:p>
+                  </a:txBody>
+                  <a:tcPr>
+                    <a:solidFill>
+                      <a:srgbClr val="F3F4F6"/>
+                    </a:solidFill>
+                  </a:tcPr>
+                </a:tc>
+                <a:tc>
+                  <a:txBody>
+                    <a:bodyPr/>
+                    <a:lstStyle/>
+                    <a:p>
+                      <a:r>
+                        <a:rPr sz="1000" b="0">
+                          <a:solidFill>
+                            <a:srgbClr val="111827"/>
+                          </a:solidFill>
+                        </a:rPr>
+                        <a:t>6.2% [1]</a:t>
                       </a:r>
                     </a:p>
                   </a:txBody>
@@ -9628,6 +9788,27 @@
                             <a:srgbClr val="111827"/>
                           </a:solidFill>
                         </a:rPr>
+                        <a:t>n/a</a:t>
+                      </a:r>
+                    </a:p>
+                  </a:txBody>
+                  <a:tcPr>
+                    <a:solidFill>
+                      <a:srgbClr val="FFFFFF"/>
+                    </a:solidFill>
+                  </a:tcPr>
+                </a:tc>
+                <a:tc>
+                  <a:txBody>
+                    <a:bodyPr/>
+                    <a:lstStyle/>
+                    <a:p>
+                      <a:r>
+                        <a:rPr sz="1000" b="0">
+                          <a:solidFill>
+                            <a:srgbClr val="111827"/>
+                          </a:solidFill>
+                        </a:rPr>
                         <a:t>28.5 months [1]</a:t>
                       </a:r>
                     </a:p>
@@ -9650,6 +9831,27 @@
                           </a:solidFill>
                         </a:rPr>
                         <a:t>10.7% [1]</a:t>
+                      </a:r>
+                    </a:p>
+                  </a:txBody>
+                  <a:tcPr>
+                    <a:solidFill>
+                      <a:srgbClr val="FFFFFF"/>
+                    </a:solidFill>
+                  </a:tcPr>
+                </a:tc>
+                <a:tc>
+                  <a:txBody>
+                    <a:bodyPr/>
+                    <a:lstStyle/>
+                    <a:p>
+                      <a:r>
+                        <a:rPr sz="1000" b="0">
+                          <a:solidFill>
+                            <a:srgbClr val="111827"/>
+                          </a:solidFill>
+                        </a:rPr>
+                        <a:t>7.5% [1]</a:t>
                       </a:r>
                     </a:p>
                   </a:txBody>
@@ -10682,7 +10884,7 @@
             <a:r>
               <a:rPr sz="900">
                 <a:solidFill>
-                  <a:srgbClr val="A8322A"/>
+                  <a:srgbClr val="B4452E"/>
                 </a:solidFill>
               </a:rPr>
               <a:t/>
@@ -10696,13 +10898,13 @@
                 </a:solidFill>
                 <a:latin typeface="Calibri"/>
               </a:rPr>
-              <a:t>Barclays buys 1 Churchill Place, Canary Wharf, for £750m</a:t>
+              <a:t>White City: Grade A vacancy 11.5% against 17.9% overall, gap widening</a:t>
             </a:r>
           </a:p>
           <a:p>
             <a:r>
               <a:rPr sz="900"/>
-              <a:t>Barclays has acquired its Canary Wharf headquarters at 1 Churchill Place for £750m, reflecting a 5.62% yield. The deal lifted Docklands &amp; Stratford investment turnover to… [10]</a:t>
+              <a:t>New and refurbished space in White City is 11.5% vacant against 17.9% for all space in Q2 2026, a gap of 6.4pp (from 5.0pp the quarter before). [1]</a:t>
             </a:r>
           </a:p>
           <a:p>
@@ -10712,7 +10914,7 @@
                   <a:srgbClr val="6B7280"/>
                 </a:solidFill>
               </a:rPr>
-              <a:t>Sets fresh pricing (yield) evidence for valuations and acquisitions.</a:t>
+              <a:t>Occupiers are concentrating on the best space: Grade A buildings let first while second-hand space waits. Supports Grade A rents and the case for refurbishment; raises the risk on older stock.</a:t>
             </a:r>
           </a:p>
         </p:txBody>
@@ -10743,7 +10945,7 @@
             <a:r>
               <a:rPr sz="900">
                 <a:solidFill>
-                  <a:srgbClr val="A8322A"/>
+                  <a:srgbClr val="B4452E"/>
                 </a:solidFill>
               </a:rPr>
               <a:t/>
@@ -10757,13 +10959,13 @@
                 </a:solidFill>
                 <a:latin typeface="Calibri"/>
               </a:rPr>
-              <a:t>Docklands &amp; Stratford investment volume +525% vs long-term average</a:t>
+              <a:t>Barclays buys 1 Churchill Place, Canary Wharf, for £750m</a:t>
             </a:r>
           </a:p>
           <a:p>
             <a:r>
               <a:rPr sz="900"/>
-              <a:t>Investment volume in Docklands &amp; Stratford was £0.75bn in Q2 2026 against a long-term average of £0.12bn. [1]</a:t>
+              <a:t>Barclays has acquired its Canary Wharf headquarters at 1 Churchill Place for £750m, reflecting a 5.62% yield. The deal lifted Docklands &amp; Stratford investment turnover to… [10]</a:t>
             </a:r>
           </a:p>
           <a:p>
@@ -10773,7 +10975,7 @@
                   <a:srgbClr val="6B7280"/>
                 </a:solidFill>
               </a:rPr>
-              <a:t>Investment is above trend: more pricing evidence and better liquidity.</a:t>
+              <a:t>Sets fresh pricing (yield) evidence for valuations and acquisitions.</a:t>
             </a:r>
           </a:p>
         </p:txBody>
@@ -10804,7 +11006,7 @@
             <a:r>
               <a:rPr sz="900">
                 <a:solidFill>
-                  <a:srgbClr val="A8322A"/>
+                  <a:srgbClr val="B4452E"/>
                 </a:solidFill>
               </a:rPr>
               <a:t/>
@@ -10818,13 +11020,13 @@
                 </a:solidFill>
                 <a:latin typeface="Calibri"/>
               </a:rPr>
-              <a:t>Q4 2025 London office investment hits £3.3bn, best quarter since Q1 2022</a:t>
+              <a:t>Docklands &amp; Stratford investment volume +525% vs long-term average</a:t>
             </a:r>
           </a:p>
           <a:p>
             <a:r>
               <a:rPr sz="900"/>
-              <a:t>London office investment reached £3.3bn in Q4 2025 with a further £3.1bn under offer, the strongest quarter since Q1 2022. [11]</a:t>
+              <a:t>Investment volume in Docklands &amp; Stratford was £0.75bn in Q2 2026 against a long-term average of £0.12bn. [1]</a:t>
             </a:r>
           </a:p>
           <a:p>
@@ -10834,7 +11036,7 @@
                   <a:srgbClr val="6B7280"/>
                 </a:solidFill>
               </a:rPr>
-              <a:t>Sets fresh pricing (yield) evidence for valuations and acquisitions.</a:t>
+              <a:t>Investment is above trend: more pricing evidence and better liquidity.</a:t>
             </a:r>
           </a:p>
         </p:txBody>
@@ -10865,7 +11067,7 @@
             <a:r>
               <a:rPr sz="900">
                 <a:solidFill>
-                  <a:srgbClr val="A8322A"/>
+                  <a:srgbClr val="B4452E"/>
                 </a:solidFill>
               </a:rPr>
               <a:t/>
@@ -10926,7 +11128,7 @@
             <a:r>
               <a:rPr sz="900">
                 <a:solidFill>
-                  <a:srgbClr val="A8322A"/>
+                  <a:srgbClr val="B4452E"/>
                 </a:solidFill>
               </a:rPr>
               <a:t/>
@@ -10987,7 +11189,7 @@
             <a:r>
               <a:rPr sz="900">
                 <a:solidFill>
-                  <a:srgbClr val="A8322A"/>
+                  <a:srgbClr val="B4452E"/>
                 </a:solidFill>
               </a:rPr>
               <a:t/>
@@ -11386,7 +11588,12 @@
             <p:ph type="body" idx="106"/>
           </p:nvPr>
         </p:nvSpPr>
-        <p:spPr/>
+        <p:spPr>
+          <a:xfrm>
+            <a:off x="548640" y="1645920"/>
+            <a:ext cx="11064240" cy="4389120"/>
+          </a:xfrm>
+        </p:spPr>
         <p:txBody>
           <a:bodyPr wrap="square"/>
           <a:lstStyle/>
@@ -11453,12 +11660,6 @@
           <a:p>
             <a:r>
               <a:rPr/>
-              <a:t>[11] Knight Frank research (seed) (2025-12-31) - https://www.knightfrank.co.uk/site-assets/research/report-pdfs/spotlight/spotlight-q4-2025-2.pdf</a:t>
-            </a:r>
-          </a:p>
-          <a:p>
-            <a:r>
-              <a:rPr/>
               <a:t/>
             </a:r>
           </a:p>
@@ -11472,21 +11673,239 @@
               <a:t>Figures restated from public research for this proof of concept (Knight Frank terms bar AI use of their data); verify against the original before external use.</a:t>
             </a:r>
           </a:p>
-          <a:p>
-            <a:r>
-              <a:rPr>
+        </p:txBody>
+      </p:sp>
+      <p:sp>
+        <p:nvSpPr>
+          <p:cNvPr id="5" name="tier dot open"/>
+          <p:cNvSpPr/>
+          <p:nvPr/>
+        </p:nvSpPr>
+        <p:spPr>
+          <a:xfrm>
+            <a:off x="548640" y="6227064"/>
+            <a:ext cx="88900" cy="88900"/>
+          </a:xfrm>
+          <a:prstGeom prst="ellipse">
+            <a:avLst/>
+          </a:prstGeom>
+          <a:solidFill>
+            <a:srgbClr val="2E7D55"/>
+          </a:solidFill>
+          <a:ln>
+            <a:noFill/>
+          </a:ln>
+        </p:spPr>
+        <p:style>
+          <a:lnRef idx="1">
+            <a:schemeClr val="accent1"/>
+          </a:lnRef>
+          <a:fillRef idx="3">
+            <a:schemeClr val="accent1"/>
+          </a:fillRef>
+          <a:effectRef idx="2">
+            <a:schemeClr val="accent1"/>
+          </a:effectRef>
+          <a:fontRef idx="minor">
+            <a:schemeClr val="lt1"/>
+          </a:fontRef>
+        </p:style>
+        <p:txBody>
+          <a:bodyPr rtlCol="0" anchor="ctr"/>
+          <a:lstStyle/>
+          <a:p>
+            <a:pPr algn="ctr"/>
+          </a:p>
+        </p:txBody>
+      </p:sp>
+      <p:sp>
+        <p:nvSpPr>
+          <p:cNvPr id="6" name="TextBox 5"/>
+          <p:cNvSpPr txBox="1"/>
+          <p:nvPr/>
+        </p:nvSpPr>
+        <p:spPr>
+          <a:xfrm>
+            <a:off x="675640" y="6144768"/>
+            <a:ext cx="2138679" cy="228600"/>
+          </a:xfrm>
+          <a:prstGeom prst="rect">
+            <a:avLst/>
+          </a:prstGeom>
+          <a:noFill/>
+        </p:spPr>
+        <p:txBody>
+          <a:bodyPr wrap="square" lIns="0" rIns="0">
+            <a:spAutoFit/>
+          </a:bodyPr>
+          <a:lstStyle/>
+          <a:p>
+            <a:r>
+              <a:rPr sz="900">
                 <a:solidFill>
                   <a:srgbClr val="6B7280"/>
                 </a:solidFill>
               </a:rPr>
-              <a:t>🟢 collected automatically from open data · 🟠 uploaded by a colleague under the team's own access</a:t>
-            </a:r>
-          </a:p>
-        </p:txBody>
-      </p:sp>
-      <p:sp>
-        <p:nvSpPr>
-          <p:cNvPr id="5" name="TextBox 4"/>
+              <a:t>Open data, collected automatically</a:t>
+            </a:r>
+          </a:p>
+        </p:txBody>
+      </p:sp>
+      <p:sp>
+        <p:nvSpPr>
+          <p:cNvPr id="7" name="tier dot uploaded"/>
+          <p:cNvSpPr/>
+          <p:nvPr/>
+        </p:nvSpPr>
+        <p:spPr>
+          <a:xfrm>
+            <a:off x="2997199" y="6227064"/>
+            <a:ext cx="88900" cy="88900"/>
+          </a:xfrm>
+          <a:prstGeom prst="ellipse">
+            <a:avLst/>
+          </a:prstGeom>
+          <a:solidFill>
+            <a:srgbClr val="B9781A"/>
+          </a:solidFill>
+          <a:ln>
+            <a:noFill/>
+          </a:ln>
+        </p:spPr>
+        <p:style>
+          <a:lnRef idx="1">
+            <a:schemeClr val="accent1"/>
+          </a:lnRef>
+          <a:fillRef idx="3">
+            <a:schemeClr val="accent1"/>
+          </a:fillRef>
+          <a:effectRef idx="2">
+            <a:schemeClr val="accent1"/>
+          </a:effectRef>
+          <a:fontRef idx="minor">
+            <a:schemeClr val="lt1"/>
+          </a:fontRef>
+        </p:style>
+        <p:txBody>
+          <a:bodyPr rtlCol="0" anchor="ctr"/>
+          <a:lstStyle/>
+          <a:p>
+            <a:pPr algn="ctr"/>
+          </a:p>
+        </p:txBody>
+      </p:sp>
+      <p:sp>
+        <p:nvSpPr>
+          <p:cNvPr id="8" name="TextBox 7"/>
+          <p:cNvSpPr txBox="1"/>
+          <p:nvPr/>
+        </p:nvSpPr>
+        <p:spPr>
+          <a:xfrm>
+            <a:off x="3124199" y="6144768"/>
+            <a:ext cx="3131820" cy="228600"/>
+          </a:xfrm>
+          <a:prstGeom prst="rect">
+            <a:avLst/>
+          </a:prstGeom>
+          <a:noFill/>
+        </p:spPr>
+        <p:txBody>
+          <a:bodyPr wrap="square" lIns="0" rIns="0">
+            <a:spAutoFit/>
+          </a:bodyPr>
+          <a:lstStyle/>
+          <a:p>
+            <a:r>
+              <a:rPr sz="900">
+                <a:solidFill>
+                  <a:srgbClr val="6B7280"/>
+                </a:solidFill>
+              </a:rPr>
+              <a:t>Uploaded by a colleague under the team's own access</a:t>
+            </a:r>
+          </a:p>
+        </p:txBody>
+      </p:sp>
+      <p:sp>
+        <p:nvSpPr>
+          <p:cNvPr id="9" name="tier dot internal"/>
+          <p:cNvSpPr/>
+          <p:nvPr/>
+        </p:nvSpPr>
+        <p:spPr>
+          <a:xfrm>
+            <a:off x="6438899" y="6227064"/>
+            <a:ext cx="88900" cy="88900"/>
+          </a:xfrm>
+          <a:prstGeom prst="ellipse">
+            <a:avLst/>
+          </a:prstGeom>
+          <a:solidFill>
+            <a:srgbClr val="2F6FBF"/>
+          </a:solidFill>
+          <a:ln>
+            <a:noFill/>
+          </a:ln>
+        </p:spPr>
+        <p:style>
+          <a:lnRef idx="1">
+            <a:schemeClr val="accent1"/>
+          </a:lnRef>
+          <a:fillRef idx="3">
+            <a:schemeClr val="accent1"/>
+          </a:fillRef>
+          <a:effectRef idx="2">
+            <a:schemeClr val="accent1"/>
+          </a:effectRef>
+          <a:fontRef idx="minor">
+            <a:schemeClr val="lt1"/>
+          </a:fontRef>
+        </p:style>
+        <p:txBody>
+          <a:bodyPr rtlCol="0" anchor="ctr"/>
+          <a:lstStyle/>
+          <a:p>
+            <a:pPr algn="ctr"/>
+          </a:p>
+        </p:txBody>
+      </p:sp>
+      <p:sp>
+        <p:nvSpPr>
+          <p:cNvPr id="10" name="TextBox 9"/>
+          <p:cNvSpPr txBox="1"/>
+          <p:nvPr/>
+        </p:nvSpPr>
+        <p:spPr>
+          <a:xfrm>
+            <a:off x="6565899" y="6144768"/>
+            <a:ext cx="1612899" cy="228600"/>
+          </a:xfrm>
+          <a:prstGeom prst="rect">
+            <a:avLst/>
+          </a:prstGeom>
+          <a:noFill/>
+        </p:spPr>
+        <p:txBody>
+          <a:bodyPr wrap="square" lIns="0" rIns="0">
+            <a:spAutoFit/>
+          </a:bodyPr>
+          <a:lstStyle/>
+          <a:p>
+            <a:r>
+              <a:rPr sz="900">
+                <a:solidFill>
+                  <a:srgbClr val="6B7280"/>
+                </a:solidFill>
+              </a:rPr>
+              <a:t>Internal, our own records</a:t>
+            </a:r>
+          </a:p>
+        </p:txBody>
+      </p:sp>
+      <p:sp>
+        <p:nvSpPr>
+          <p:cNvPr id="11" name="TextBox 10"/>
           <p:cNvSpPr txBox="1"/>
           <p:nvPr/>
         </p:nvSpPr>

--- a/docs/samples/team-brief-ic-sample.pptx
+++ b/docs/samples/team-brief-ic-sample.pptx
@@ -8777,7 +8777,7 @@
           <a:p>
             <a:r>
               <a:rPr/>
-              <a:t>LONDON OFFICE MARKET  ·  10 OCT 2026</a:t>
+              <a:t>LONDON OFFICE MARKET  ·  11 OCT 2026</a:t>
             </a:r>
           </a:p>
         </p:txBody>
@@ -8821,7 +8821,7 @@
           <a:p>
             <a:r>
               <a:rPr/>
-              <a:t>Investment committee paper  ·  figures to Q2 2026  ·  10 Oct 2026</a:t>
+              <a:t>Investment committee paper  ·  figures to Q2 2026  ·  11 Oct 2026</a:t>
             </a:r>
           </a:p>
         </p:txBody>
@@ -9134,6 +9134,30 @@
           </a:p>
         </p:txBody>
       </p:sp>
+      <p:pic>
+        <p:nvPicPr>
+          <p:cNvPr id="11" name="co-brand" descr="cobrand-nanfung-on-dark@2x.png"/>
+          <p:cNvPicPr>
+            <a:picLocks noChangeAspect="1"/>
+          </p:cNvPicPr>
+          <p:nvPr/>
+        </p:nvPicPr>
+        <p:blipFill>
+          <a:blip r:embed="rId2"/>
+          <a:stretch>
+            <a:fillRect/>
+          </a:stretch>
+        </p:blipFill>
+        <p:spPr>
+          <a:xfrm>
+            <a:off x="8457914" y="347472"/>
+            <a:ext cx="3203734" cy="566928"/>
+          </a:xfrm>
+          <a:prstGeom prst="rect">
+            <a:avLst/>
+          </a:prstGeom>
+        </p:spPr>
+      </p:pic>
     </p:spTree>
   </p:cSld>
   <p:clrMapOvr>
@@ -9196,9 +9220,33 @@
           </a:p>
         </p:txBody>
       </p:sp>
+      <p:pic>
+        <p:nvPicPr>
+          <p:cNvPr id="4" name="app icon" descr="app-icon-1024.png"/>
+          <p:cNvPicPr>
+            <a:picLocks noChangeAspect="1"/>
+          </p:cNvPicPr>
+          <p:nvPr/>
+        </p:nvPicPr>
+        <p:blipFill>
+          <a:blip r:embed="rId2"/>
+          <a:stretch>
+            <a:fillRect/>
+          </a:stretch>
+        </p:blipFill>
+        <p:spPr>
+          <a:xfrm>
+            <a:off x="10607040" y="6455664"/>
+            <a:ext cx="274320" cy="274320"/>
+          </a:xfrm>
+          <a:prstGeom prst="rect">
+            <a:avLst/>
+          </a:prstGeom>
+        </p:spPr>
+      </p:pic>
       <p:graphicFrame>
         <p:nvGraphicFramePr>
-          <p:cNvPr id="4" name="Table 3"/>
+          <p:cNvPr id="5" name="Table 4"/>
           <p:cNvGraphicFramePr>
             <a:graphicFrameLocks noGrp="1"/>
           </p:cNvGraphicFramePr>
@@ -9910,7 +9958,7 @@
       </p:graphicFrame>
       <p:sp>
         <p:nvSpPr>
-          <p:cNvPr id="5" name="TextBox 4"/>
+          <p:cNvPr id="6" name="TextBox 5"/>
           <p:cNvSpPr txBox="1"/>
           <p:nvPr/>
         </p:nvSpPr>
@@ -10042,7 +10090,7 @@
         </p:xfrm>
         <a:graphic>
           <a:graphicData uri="http://schemas.openxmlformats.org/drawingml/2006/chart">
-            <c:chart xmlns:c="http://schemas.openxmlformats.org/drawingml/2006/chart" r:id="rId2"/>
+            <c:chart xmlns:c="http://schemas.openxmlformats.org/drawingml/2006/chart" r:id="rId3"/>
           </a:graphicData>
         </a:graphic>
       </p:graphicFrame>
@@ -10084,7 +10132,7 @@
         </p:xfrm>
         <a:graphic>
           <a:graphicData uri="http://schemas.openxmlformats.org/drawingml/2006/chart">
-            <c:chart xmlns:c="http://schemas.openxmlformats.org/drawingml/2006/chart" r:id="rId3"/>
+            <c:chart xmlns:c="http://schemas.openxmlformats.org/drawingml/2006/chart" r:id="rId4"/>
           </a:graphicData>
         </a:graphic>
       </p:graphicFrame>
@@ -10110,9 +10158,33 @@
           </a:p>
         </p:txBody>
       </p:sp>
-      <p:sp>
-        <p:nvSpPr>
-          <p:cNvPr id="9" name="Rectangle 8"/>
+      <p:pic>
+        <p:nvPicPr>
+          <p:cNvPr id="9" name="app icon" descr="app-icon-1024.png"/>
+          <p:cNvPicPr>
+            <a:picLocks noChangeAspect="1"/>
+          </p:cNvPicPr>
+          <p:nvPr/>
+        </p:nvPicPr>
+        <p:blipFill>
+          <a:blip r:embed="rId2"/>
+          <a:stretch>
+            <a:fillRect/>
+          </a:stretch>
+        </p:blipFill>
+        <p:spPr>
+          <a:xfrm>
+            <a:off x="10607040" y="6455664"/>
+            <a:ext cx="274320" cy="274320"/>
+          </a:xfrm>
+          <a:prstGeom prst="rect">
+            <a:avLst/>
+          </a:prstGeom>
+        </p:spPr>
+      </p:pic>
+      <p:sp>
+        <p:nvSpPr>
+          <p:cNvPr id="10" name="Rectangle 9"/>
           <p:cNvSpPr/>
           <p:nvPr/>
         </p:nvSpPr>
@@ -10171,7 +10243,7 @@
       </p:sp>
       <p:sp>
         <p:nvSpPr>
-          <p:cNvPr id="10" name="TextBox 9"/>
+          <p:cNvPr id="11" name="TextBox 10"/>
           <p:cNvSpPr txBox="1"/>
           <p:nvPr/>
         </p:nvSpPr>
@@ -10303,7 +10375,7 @@
         </p:xfrm>
         <a:graphic>
           <a:graphicData uri="http://schemas.openxmlformats.org/drawingml/2006/chart">
-            <c:chart xmlns:c="http://schemas.openxmlformats.org/drawingml/2006/chart" r:id="rId2"/>
+            <c:chart xmlns:c="http://schemas.openxmlformats.org/drawingml/2006/chart" r:id="rId3"/>
           </a:graphicData>
         </a:graphic>
       </p:graphicFrame>
@@ -10351,9 +10423,33 @@
           </a:p>
         </p:txBody>
       </p:sp>
+      <p:pic>
+        <p:nvPicPr>
+          <p:cNvPr id="9" name="app icon" descr="app-icon-1024.png"/>
+          <p:cNvPicPr>
+            <a:picLocks noChangeAspect="1"/>
+          </p:cNvPicPr>
+          <p:nvPr/>
+        </p:nvPicPr>
+        <p:blipFill>
+          <a:blip r:embed="rId2"/>
+          <a:stretch>
+            <a:fillRect/>
+          </a:stretch>
+        </p:blipFill>
+        <p:spPr>
+          <a:xfrm>
+            <a:off x="10607040" y="6455664"/>
+            <a:ext cx="274320" cy="274320"/>
+          </a:xfrm>
+          <a:prstGeom prst="rect">
+            <a:avLst/>
+          </a:prstGeom>
+        </p:spPr>
+      </p:pic>
       <p:graphicFrame>
         <p:nvGraphicFramePr>
-          <p:cNvPr id="9" name="Table 8"/>
+          <p:cNvPr id="10" name="Table 9"/>
           <p:cNvGraphicFramePr>
             <a:graphicFrameLocks noGrp="1"/>
           </p:cNvGraphicFramePr>
@@ -10705,7 +10801,7 @@
       </p:graphicFrame>
       <p:sp>
         <p:nvSpPr>
-          <p:cNvPr id="10" name="Rectangle 9"/>
+          <p:cNvPr id="11" name="Rectangle 10"/>
           <p:cNvSpPr/>
           <p:nvPr/>
         </p:nvSpPr>
@@ -10764,7 +10860,7 @@
       </p:sp>
       <p:sp>
         <p:nvSpPr>
-          <p:cNvPr id="11" name="TextBox 10"/>
+          <p:cNvPr id="12" name="TextBox 11"/>
           <p:cNvSpPr txBox="1"/>
           <p:nvPr/>
         </p:nvSpPr>
@@ -11224,9 +11320,33 @@
           </a:p>
         </p:txBody>
       </p:sp>
-      <p:sp>
-        <p:nvSpPr>
-          <p:cNvPr id="11" name="Rectangle 10"/>
+      <p:pic>
+        <p:nvPicPr>
+          <p:cNvPr id="11" name="app icon" descr="app-icon-1024.png"/>
+          <p:cNvPicPr>
+            <a:picLocks noChangeAspect="1"/>
+          </p:cNvPicPr>
+          <p:nvPr/>
+        </p:nvPicPr>
+        <p:blipFill>
+          <a:blip r:embed="rId2"/>
+          <a:stretch>
+            <a:fillRect/>
+          </a:stretch>
+        </p:blipFill>
+        <p:spPr>
+          <a:xfrm>
+            <a:off x="10607040" y="6455664"/>
+            <a:ext cx="274320" cy="274320"/>
+          </a:xfrm>
+          <a:prstGeom prst="rect">
+            <a:avLst/>
+          </a:prstGeom>
+        </p:spPr>
+      </p:pic>
+      <p:sp>
+        <p:nvSpPr>
+          <p:cNvPr id="12" name="Rectangle 11"/>
           <p:cNvSpPr/>
           <p:nvPr/>
         </p:nvSpPr>
@@ -11269,7 +11389,7 @@
       </p:sp>
       <p:sp>
         <p:nvSpPr>
-          <p:cNvPr id="12" name="Rectangle 11"/>
+          <p:cNvPr id="13" name="Rectangle 12"/>
           <p:cNvSpPr/>
           <p:nvPr/>
         </p:nvSpPr>
@@ -11312,7 +11432,7 @@
       </p:sp>
       <p:sp>
         <p:nvSpPr>
-          <p:cNvPr id="13" name="Rectangle 12"/>
+          <p:cNvPr id="14" name="Rectangle 13"/>
           <p:cNvSpPr/>
           <p:nvPr/>
         </p:nvSpPr>
@@ -11355,7 +11475,7 @@
       </p:sp>
       <p:sp>
         <p:nvSpPr>
-          <p:cNvPr id="14" name="Rectangle 13"/>
+          <p:cNvPr id="15" name="Rectangle 14"/>
           <p:cNvSpPr/>
           <p:nvPr/>
         </p:nvSpPr>
@@ -11398,7 +11518,7 @@
       </p:sp>
       <p:sp>
         <p:nvSpPr>
-          <p:cNvPr id="15" name="Rectangle 14"/>
+          <p:cNvPr id="16" name="Rectangle 15"/>
           <p:cNvSpPr/>
           <p:nvPr/>
         </p:nvSpPr>
@@ -11441,7 +11561,7 @@
       </p:sp>
       <p:sp>
         <p:nvSpPr>
-          <p:cNvPr id="16" name="Rectangle 15"/>
+          <p:cNvPr id="17" name="Rectangle 16"/>
           <p:cNvSpPr/>
           <p:nvPr/>
         </p:nvSpPr>
@@ -11484,7 +11604,7 @@
       </p:sp>
       <p:sp>
         <p:nvSpPr>
-          <p:cNvPr id="17" name="TextBox 16"/>
+          <p:cNvPr id="18" name="TextBox 17"/>
           <p:cNvSpPr txBox="1"/>
           <p:nvPr/>
         </p:nvSpPr>
@@ -11600,7 +11720,7 @@
           <a:p>
             <a:r>
               <a:rPr/>
-              <a:t>[1] London Offices Spotlight Q2 2026 (Uploaded by PoC seed · 2026-10-10) - https://www.knightfrank.co.uk/site-assets/research/report-pdfs/london-office-spotlight/spotlight-q2-2026.pdf</a:t>
+              <a:t>[1] London Offices Spotlight Q2 2026 (Uploaded by PoC seed · 2026-10-11) - https://www.knightfrank.co.uk/site-assets/research/report-pdfs/london-office-spotlight/spotlight-q2-2026.pdf</a:t>
             </a:r>
           </a:p>
           <a:p>
@@ -11612,43 +11732,43 @@
           <a:p>
             <a:r>
               <a:rPr/>
-              <a:t>[3] The London Office Market Report Q1 2024 (Uploaded by PoC seed · 2026-10-10) - https://content.knightfrank.com/research/104/documents/en/the-london-office-market-report-q1-2024-11170.pdf</a:t>
+              <a:t>[3] The London Office Market Report Q1 2024 (Uploaded by PoC seed · 2026-10-11) - https://content.knightfrank.com/research/104/documents/en/the-london-office-market-report-q1-2024-11170.pdf</a:t>
             </a:r>
           </a:p>
           <a:p>
             <a:r>
               <a:rPr/>
-              <a:t>[4] London Offices Spotlight Q2 2024 (Uploaded by PoC seed · 2026-10-10) - https://content.knightfrank.com/research/1903/documents/en/london-offices-spotlight-q2-2024-11338.pdf</a:t>
+              <a:t>[4] London Offices Spotlight Q2 2024 (Uploaded by PoC seed · 2026-10-11) - https://content.knightfrank.com/research/1903/documents/en/london-offices-spotlight-q2-2024-11338.pdf</a:t>
             </a:r>
           </a:p>
           <a:p>
             <a:r>
               <a:rPr/>
-              <a:t>[5] The London Office Market Report Q3 2024 (Uploaded by PoC seed · 2026-10-10) - https://www.knightfrank.co.uk/research/reports/the-london-office-market-report-104/contentassets/the-london-office-market-report-q3-2024-11701.pdf</a:t>
+              <a:t>[5] The London Office Market Report Q3 2024 (Uploaded by PoC seed · 2026-10-11) - https://www.knightfrank.co.uk/research/reports/the-london-office-market-report-104/contentassets/the-london-office-market-report-q3-2024-11701.pdf</a:t>
             </a:r>
           </a:p>
           <a:p>
             <a:r>
               <a:rPr/>
-              <a:t>[6] The London Office Market Report Q2 2025 (Uploaded by PoC seed · 2026-10-10) - https://content.knightfrank.com/research/104/documents/en/the-london-office-market-report-q2-2025-12541.pdf</a:t>
+              <a:t>[6] The London Office Market Report Q2 2025 (Uploaded by PoC seed · 2026-10-11) - https://content.knightfrank.com/research/104/documents/en/the-london-office-market-report-q2-2025-12541.pdf</a:t>
             </a:r>
           </a:p>
           <a:p>
             <a:r>
               <a:rPr/>
-              <a:t>[7] London Offices Spotlight Q3 2025 (Uploaded by PoC seed · 2026-10-10) - https://content.knightfrank.com/research/1903/documents/en/london-offices-spotlight-q3-2025-12540.pdf</a:t>
+              <a:t>[7] London Offices Spotlight Q3 2025 (Uploaded by PoC seed · 2026-10-11) - https://content.knightfrank.com/research/1903/documents/en/london-offices-spotlight-q3-2025-12540.pdf</a:t>
             </a:r>
           </a:p>
           <a:p>
             <a:r>
               <a:rPr/>
-              <a:t>[8] London Offices Spotlight Q4 2025 (Uploaded by PoC seed · 2026-10-10) - https://www.knightfrank.co.uk/site-assets/research/report-pdfs/spotlight/spotlight-q4-2025-2.pdf</a:t>
+              <a:t>[8] London Offices Spotlight Q4 2025 (Uploaded by PoC seed · 2026-10-11) - https://www.knightfrank.co.uk/site-assets/research/report-pdfs/spotlight/spotlight-q4-2025-2.pdf</a:t>
             </a:r>
           </a:p>
           <a:p>
             <a:r>
               <a:rPr/>
-              <a:t>[9] London Offices Spotlight Q1 2026 (Uploaded by PoC seed · 2026-10-10) - https://www.knightfrank.co.uk/site-assets/research/report-pdfs/london-office-spotlight/spotlight-q1-2026v3.pdf</a:t>
+              <a:t>[9] London Offices Spotlight Q1 2026 (Uploaded by PoC seed · 2026-10-11) - https://www.knightfrank.co.uk/site-assets/research/report-pdfs/london-office-spotlight/spotlight-q1-2026v3.pdf</a:t>
             </a:r>
           </a:p>
           <a:p>
@@ -11675,9 +11795,33 @@
           </a:p>
         </p:txBody>
       </p:sp>
-      <p:sp>
-        <p:nvSpPr>
-          <p:cNvPr id="5" name="tier dot open"/>
+      <p:pic>
+        <p:nvPicPr>
+          <p:cNvPr id="5" name="app icon" descr="app-icon-1024.png"/>
+          <p:cNvPicPr>
+            <a:picLocks noChangeAspect="1"/>
+          </p:cNvPicPr>
+          <p:nvPr/>
+        </p:nvPicPr>
+        <p:blipFill>
+          <a:blip r:embed="rId2"/>
+          <a:stretch>
+            <a:fillRect/>
+          </a:stretch>
+        </p:blipFill>
+        <p:spPr>
+          <a:xfrm>
+            <a:off x="10607040" y="6455664"/>
+            <a:ext cx="274320" cy="274320"/>
+          </a:xfrm>
+          <a:prstGeom prst="rect">
+            <a:avLst/>
+          </a:prstGeom>
+        </p:spPr>
+      </p:pic>
+      <p:sp>
+        <p:nvSpPr>
+          <p:cNvPr id="6" name="tier dot open"/>
           <p:cNvSpPr/>
           <p:nvPr/>
         </p:nvSpPr>
@@ -11720,7 +11864,7 @@
       </p:sp>
       <p:sp>
         <p:nvSpPr>
-          <p:cNvPr id="6" name="TextBox 5"/>
+          <p:cNvPr id="7" name="TextBox 6"/>
           <p:cNvSpPr txBox="1"/>
           <p:nvPr/>
         </p:nvSpPr>
@@ -11753,7 +11897,7 @@
       </p:sp>
       <p:sp>
         <p:nvSpPr>
-          <p:cNvPr id="7" name="tier dot uploaded"/>
+          <p:cNvPr id="8" name="tier dot uploaded"/>
           <p:cNvSpPr/>
           <p:nvPr/>
         </p:nvSpPr>
@@ -11796,7 +11940,7 @@
       </p:sp>
       <p:sp>
         <p:nvSpPr>
-          <p:cNvPr id="8" name="TextBox 7"/>
+          <p:cNvPr id="9" name="TextBox 8"/>
           <p:cNvSpPr txBox="1"/>
           <p:nvPr/>
         </p:nvSpPr>
@@ -11829,7 +11973,7 @@
       </p:sp>
       <p:sp>
         <p:nvSpPr>
-          <p:cNvPr id="9" name="tier dot internal"/>
+          <p:cNvPr id="10" name="tier dot internal"/>
           <p:cNvSpPr/>
           <p:nvPr/>
         </p:nvSpPr>
@@ -11872,7 +12016,7 @@
       </p:sp>
       <p:sp>
         <p:nvSpPr>
-          <p:cNvPr id="10" name="TextBox 9"/>
+          <p:cNvPr id="11" name="TextBox 10"/>
           <p:cNvSpPr txBox="1"/>
           <p:nvPr/>
         </p:nvSpPr>
@@ -11905,7 +12049,7 @@
       </p:sp>
       <p:sp>
         <p:nvSpPr>
-          <p:cNvPr id="11" name="TextBox 10"/>
+          <p:cNvPr id="12" name="TextBox 11"/>
           <p:cNvSpPr txBox="1"/>
           <p:nvPr/>
         </p:nvSpPr>
